--- a/Misc/FileFormats-Notes.pptx
+++ b/Misc/FileFormats-Notes.pptx
@@ -5,7 +5,7 @@
     <p:sldMasterId id="2147483648" r:id="rId1"/>
   </p:sldMasterIdLst>
   <p:notesMasterIdLst>
-    <p:notesMasterId r:id="rId10"/>
+    <p:notesMasterId r:id="rId15"/>
   </p:notesMasterIdLst>
   <p:sldIdLst>
     <p:sldId id="256" r:id="rId3"/>
@@ -14,12 +14,17 @@
     <p:sldId id="264" r:id="rId6"/>
     <p:sldId id="267" r:id="rId7"/>
     <p:sldId id="268" r:id="rId8"/>
-    <p:sldId id="261" r:id="rId9"/>
+    <p:sldId id="269" r:id="rId9"/>
+    <p:sldId id="270" r:id="rId10"/>
+    <p:sldId id="271" r:id="rId11"/>
+    <p:sldId id="272" r:id="rId12"/>
+    <p:sldId id="273" r:id="rId13"/>
+    <p:sldId id="261" r:id="rId14"/>
   </p:sldIdLst>
   <p:sldSz cx="12192000" cy="6858000"/>
   <p:notesSz cx="6858000" cy="9144000"/>
   <p:custDataLst>
-    <p:tags r:id="rId14"/>
+    <p:tags r:id="rId19"/>
   </p:custDataLst>
   <p:defaultTextStyle>
     <a:defPPr>
@@ -3585,6 +3590,700 @@
 </p:sld>
 </file>
 
+<file path=ppt/slides/slide10.xml><?xml version="1.0" encoding="utf-8"?>
+<p:sld xmlns:a="http://schemas.openxmlformats.org/drawingml/2006/main" xmlns:r="http://schemas.openxmlformats.org/officeDocument/2006/relationships" xmlns:p="http://schemas.openxmlformats.org/presentationml/2006/main">
+  <p:cSld>
+    <p:spTree>
+      <p:nvGrpSpPr>
+        <p:cNvPr id="1" name=""/>
+        <p:cNvGrpSpPr/>
+        <p:nvPr/>
+      </p:nvGrpSpPr>
+      <p:grpSpPr/>
+      <p:sp>
+        <p:nvSpPr>
+          <p:cNvPr id="2" name="标题 1"/>
+          <p:cNvSpPr>
+            <a:spLocks noGrp="1"/>
+          </p:cNvSpPr>
+          <p:nvPr>
+            <p:ph type="title"/>
+          </p:nvPr>
+        </p:nvSpPr>
+        <p:spPr/>
+        <p:txBody>
+          <a:bodyPr/>
+          <a:p>
+            <a:r>
+              <a:rPr lang="en-US" altLang="zh-CN"/>
+              <a:t>Intro</a:t>
+            </a:r>
+            <a:endParaRPr lang="en-US" altLang="zh-CN"/>
+          </a:p>
+        </p:txBody>
+      </p:sp>
+      <p:sp>
+        <p:nvSpPr>
+          <p:cNvPr id="3" name="内容占位符 2"/>
+          <p:cNvSpPr>
+            <a:spLocks noGrp="1"/>
+          </p:cNvSpPr>
+          <p:nvPr>
+            <p:ph idx="1"/>
+          </p:nvPr>
+        </p:nvSpPr>
+        <p:spPr>
+          <a:xfrm>
+            <a:off x="838200" y="1211580"/>
+            <a:ext cx="5725160" cy="5052695"/>
+          </a:xfrm>
+        </p:spPr>
+        <p:txBody>
+          <a:bodyPr>
+            <a:normAutofit fontScale="90000" lnSpcReduction="10000"/>
+          </a:bodyPr>
+          <a:p>
+            <a:r>
+              <a:rPr lang="en-US" altLang="zh-CN" sz="2000"/>
+              <a:t>References</a:t>
+            </a:r>
+            <a:endParaRPr lang="en-US" altLang="zh-CN" sz="2000"/>
+          </a:p>
+          <a:p>
+            <a:pPr lvl="1"/>
+            <a:r>
+              <a:rPr lang="en-US" altLang="zh-CN" sz="1600"/>
+              <a:t>https://github.com/mermaid-js/mermaid</a:t>
+            </a:r>
+            <a:endParaRPr lang="en-US" altLang="zh-CN" sz="1600"/>
+          </a:p>
+          <a:p>
+            <a:pPr lvl="1"/>
+            <a:r>
+              <a:rPr lang="en-US" altLang="zh-CN" sz="1600"/>
+              <a:t>https://zhuanlan.zhihu.com/p/627356428</a:t>
+            </a:r>
+            <a:endParaRPr lang="en-US" altLang="zh-CN" sz="1600"/>
+          </a:p>
+          <a:p>
+            <a:pPr lvl="0"/>
+            <a:r>
+              <a:rPr lang="en-US" altLang="zh-CN" sz="2000"/>
+              <a:t>Intro</a:t>
+            </a:r>
+            <a:endParaRPr lang="en-US" altLang="zh-CN" sz="2000"/>
+          </a:p>
+          <a:p>
+            <a:pPr lvl="1"/>
+            <a:r>
+              <a:rPr lang="zh-CN" altLang="en-US" sz="1600"/>
+              <a:t>开源的文本驱动图表生成工具</a:t>
+            </a:r>
+            <a:endParaRPr lang="zh-CN" altLang="en-US" sz="1600"/>
+          </a:p>
+          <a:p>
+            <a:pPr lvl="1"/>
+            <a:r>
+              <a:rPr lang="zh-CN" altLang="en-US" sz="1600"/>
+              <a:t>语言风格类似于</a:t>
+            </a:r>
+            <a:r>
+              <a:rPr lang="en-US" altLang="zh-CN" sz="1600"/>
+              <a:t> Markdown</a:t>
+            </a:r>
+            <a:endParaRPr lang="en-US" altLang="zh-CN" sz="1600"/>
+          </a:p>
+          <a:p>
+            <a:pPr lvl="1"/>
+            <a:r>
+              <a:rPr lang="zh-CN" altLang="en-US" sz="1600"/>
+              <a:t>优点：简单性和可移植性</a:t>
+            </a:r>
+            <a:endParaRPr lang="zh-CN" altLang="en-US" sz="1600"/>
+          </a:p>
+          <a:p>
+            <a:pPr lvl="1"/>
+            <a:r>
+              <a:rPr lang="zh-CN" altLang="en-US" sz="1600"/>
+              <a:t>支持图表类型</a:t>
+            </a:r>
+            <a:endParaRPr lang="zh-CN" altLang="en-US" sz="1600"/>
+          </a:p>
+          <a:p>
+            <a:pPr lvl="2"/>
+            <a:r>
+              <a:rPr lang="zh-CN" altLang="en-US" sz="1400"/>
+              <a:t>流程图（</a:t>
+            </a:r>
+            <a:r>
+              <a:rPr lang="en-US" altLang="zh-CN" sz="1400"/>
+              <a:t>Flowchart</a:t>
+            </a:r>
+            <a:r>
+              <a:rPr lang="zh-CN" altLang="en-US" sz="1400"/>
+              <a:t>）：展示过程、决策和操作流程。</a:t>
+            </a:r>
+            <a:endParaRPr lang="zh-CN" altLang="en-US" sz="1400"/>
+          </a:p>
+          <a:p>
+            <a:pPr lvl="2"/>
+            <a:r>
+              <a:rPr lang="zh-CN" altLang="en-US" sz="1400"/>
+              <a:t>序列图（</a:t>
+            </a:r>
+            <a:r>
+              <a:rPr lang="en-US" altLang="zh-CN" sz="1400"/>
+              <a:t>Sequence Diagram</a:t>
+            </a:r>
+            <a:r>
+              <a:rPr lang="zh-CN" altLang="en-US" sz="1400"/>
+              <a:t>）：展示对象之间的交互顺序。</a:t>
+            </a:r>
+            <a:endParaRPr lang="zh-CN" altLang="en-US" sz="1400"/>
+          </a:p>
+          <a:p>
+            <a:pPr lvl="2"/>
+            <a:r>
+              <a:rPr lang="zh-CN" altLang="en-US" sz="1400"/>
+              <a:t>甘特图（</a:t>
+            </a:r>
+            <a:r>
+              <a:rPr lang="en-US" altLang="zh-CN" sz="1400"/>
+              <a:t>Gantt Chart</a:t>
+            </a:r>
+            <a:r>
+              <a:rPr lang="zh-CN" altLang="en-US" sz="1400"/>
+              <a:t>）：展示项目计划和进度。</a:t>
+            </a:r>
+            <a:endParaRPr lang="zh-CN" altLang="en-US" sz="1400"/>
+          </a:p>
+          <a:p>
+            <a:pPr lvl="2"/>
+            <a:r>
+              <a:rPr lang="zh-CN" altLang="en-US" sz="1400"/>
+              <a:t>词云图（</a:t>
+            </a:r>
+            <a:r>
+              <a:rPr lang="en-US" altLang="zh-CN" sz="1400"/>
+              <a:t>Class Diagram</a:t>
+            </a:r>
+            <a:r>
+              <a:rPr lang="zh-CN" altLang="en-US" sz="1400"/>
+              <a:t>）：展示类的结构和关系。</a:t>
+            </a:r>
+            <a:endParaRPr lang="zh-CN" altLang="en-US" sz="1400"/>
+          </a:p>
+          <a:p>
+            <a:pPr lvl="2"/>
+            <a:r>
+              <a:rPr lang="zh-CN" altLang="en-US" sz="1400"/>
+              <a:t>饼图（</a:t>
+            </a:r>
+            <a:r>
+              <a:rPr lang="en-US" altLang="zh-CN" sz="1400"/>
+              <a:t>Pie Chart</a:t>
+            </a:r>
+            <a:r>
+              <a:rPr lang="zh-CN" altLang="en-US" sz="1400"/>
+              <a:t>）：展示数据占比。</a:t>
+            </a:r>
+            <a:endParaRPr lang="zh-CN" altLang="en-US" sz="1400"/>
+          </a:p>
+          <a:p>
+            <a:pPr lvl="2"/>
+            <a:r>
+              <a:rPr lang="zh-CN" altLang="en-US" sz="1400"/>
+              <a:t>捷径图（</a:t>
+            </a:r>
+            <a:r>
+              <a:rPr lang="en-US" altLang="zh-CN" sz="1400"/>
+              <a:t>Shortcut</a:t>
+            </a:r>
+            <a:r>
+              <a:rPr lang="zh-CN" altLang="en-US" sz="1400"/>
+              <a:t>）：简单展示快捷方式。</a:t>
+            </a:r>
+            <a:endParaRPr lang="zh-CN" altLang="en-US" sz="1400"/>
+          </a:p>
+          <a:p>
+            <a:pPr lvl="2"/>
+            <a:r>
+              <a:rPr lang="zh-CN" altLang="en-US" sz="1400"/>
+              <a:t>状态图（</a:t>
+            </a:r>
+            <a:r>
+              <a:rPr lang="en-US" altLang="zh-CN" sz="1400"/>
+              <a:t>State Diagram</a:t>
+            </a:r>
+            <a:r>
+              <a:rPr lang="zh-CN" altLang="en-US" sz="1400"/>
+              <a:t>）：展示对象状态的转换。</a:t>
+            </a:r>
+            <a:endParaRPr lang="zh-CN" altLang="en-US" sz="1400"/>
+          </a:p>
+          <a:p>
+            <a:pPr lvl="2"/>
+            <a:r>
+              <a:rPr lang="zh-CN" altLang="en-US" sz="1400"/>
+              <a:t>用户旅程图（</a:t>
+            </a:r>
+            <a:r>
+              <a:rPr lang="en-US" altLang="zh-CN" sz="1400"/>
+              <a:t>Journey</a:t>
+            </a:r>
+            <a:r>
+              <a:rPr lang="zh-CN" altLang="en-US" sz="1400"/>
+              <a:t>）：展示用户如何与应用程序交互。</a:t>
+            </a:r>
+            <a:endParaRPr lang="zh-CN" altLang="en-US" sz="1400"/>
+          </a:p>
+          <a:p>
+            <a:pPr lvl="0"/>
+            <a:r>
+              <a:rPr lang="en-US" altLang="zh-CN" sz="2000"/>
+              <a:t>Usage</a:t>
+            </a:r>
+            <a:endParaRPr lang="en-US" altLang="zh-CN" sz="2000"/>
+          </a:p>
+          <a:p>
+            <a:pPr lvl="1"/>
+            <a:r>
+              <a:rPr lang="en-US" altLang="zh-CN" sz="1665"/>
+              <a:t>Keyword: graph, subgraph, pie, --&gt;, -|&gt;, ---, --, =&gt;, ==&gt;, class, interface, participant, note, title, style, click, loop, alt, activate, deactivate, subroutine</a:t>
+            </a:r>
+            <a:endParaRPr lang="en-US" altLang="zh-CN" sz="1495"/>
+          </a:p>
+        </p:txBody>
+      </p:sp>
+      <p:sp>
+        <p:nvSpPr>
+          <p:cNvPr id="4" name="文本框 3"/>
+          <p:cNvSpPr txBox="1"/>
+          <p:nvPr/>
+        </p:nvSpPr>
+        <p:spPr>
+          <a:xfrm>
+            <a:off x="7106920" y="1289685"/>
+            <a:ext cx="1814195" cy="1168400"/>
+          </a:xfrm>
+          <a:prstGeom prst="rect">
+            <a:avLst/>
+          </a:prstGeom>
+          <a:noFill/>
+          <a:ln>
+            <a:solidFill>
+              <a:srgbClr val="C00000"/>
+            </a:solidFill>
+          </a:ln>
+        </p:spPr>
+        <p:txBody>
+          <a:bodyPr wrap="square" rtlCol="0">
+            <a:spAutoFit/>
+          </a:bodyPr>
+          <a:p>
+            <a:r>
+              <a:rPr lang="en-US" altLang="zh-CN" sz="1400"/>
+              <a:t># flowchart</a:t>
+            </a:r>
+            <a:endParaRPr lang="en-US" altLang="zh-CN" sz="1400"/>
+          </a:p>
+          <a:p>
+            <a:r>
+              <a:rPr lang="en-US" altLang="zh-CN" sz="1400"/>
+              <a:t>graph LR</a:t>
+            </a:r>
+            <a:endParaRPr lang="en-US" altLang="zh-CN" sz="1400"/>
+          </a:p>
+          <a:p>
+            <a:r>
+              <a:rPr lang="en-US" altLang="zh-CN" sz="1400"/>
+              <a:t>   A--&gt;B;</a:t>
+            </a:r>
+            <a:endParaRPr lang="en-US" altLang="zh-CN" sz="1400"/>
+          </a:p>
+          <a:p>
+            <a:r>
+              <a:rPr lang="en-US" altLang="zh-CN" sz="1400"/>
+              <a:t>   B--&gt;C;</a:t>
+            </a:r>
+            <a:endParaRPr lang="en-US" altLang="zh-CN" sz="1400"/>
+          </a:p>
+          <a:p>
+            <a:r>
+              <a:rPr lang="en-US" altLang="zh-CN" sz="1400"/>
+              <a:t>   C--&gt;D;</a:t>
+            </a:r>
+            <a:endParaRPr lang="en-US" altLang="zh-CN" sz="1400"/>
+          </a:p>
+        </p:txBody>
+      </p:sp>
+      <p:sp>
+        <p:nvSpPr>
+          <p:cNvPr id="5" name="文本框 4"/>
+          <p:cNvSpPr txBox="1"/>
+          <p:nvPr/>
+        </p:nvSpPr>
+        <p:spPr>
+          <a:xfrm>
+            <a:off x="9140190" y="1289685"/>
+            <a:ext cx="1814195" cy="953135"/>
+          </a:xfrm>
+          <a:prstGeom prst="rect">
+            <a:avLst/>
+          </a:prstGeom>
+          <a:noFill/>
+          <a:ln>
+            <a:solidFill>
+              <a:srgbClr val="C00000"/>
+            </a:solidFill>
+          </a:ln>
+        </p:spPr>
+        <p:txBody>
+          <a:bodyPr wrap="square" rtlCol="0">
+            <a:spAutoFit/>
+          </a:bodyPr>
+          <a:p>
+            <a:r>
+              <a:rPr lang="en-US" altLang="zh-CN" sz="1400"/>
+              <a:t>sequenceDiagram</a:t>
+            </a:r>
+            <a:endParaRPr lang="en-US" altLang="zh-CN" sz="1400"/>
+          </a:p>
+          <a:p>
+            <a:r>
+              <a:rPr lang="en-US" altLang="zh-CN" sz="1400"/>
+              <a:t>   A-&gt;&gt;B: Message 1</a:t>
+            </a:r>
+            <a:endParaRPr lang="en-US" altLang="zh-CN" sz="1400"/>
+          </a:p>
+          <a:p>
+            <a:r>
+              <a:rPr lang="en-US" altLang="zh-CN" sz="1400"/>
+              <a:t>   B--&gt;&gt;A: Message 2</a:t>
+            </a:r>
+            <a:endParaRPr lang="en-US" altLang="zh-CN" sz="1400"/>
+          </a:p>
+        </p:txBody>
+      </p:sp>
+      <p:sp>
+        <p:nvSpPr>
+          <p:cNvPr id="6" name="文本框 5"/>
+          <p:cNvSpPr txBox="1"/>
+          <p:nvPr/>
+        </p:nvSpPr>
+        <p:spPr>
+          <a:xfrm>
+            <a:off x="9140190" y="2458085"/>
+            <a:ext cx="1814195" cy="2676525"/>
+          </a:xfrm>
+          <a:prstGeom prst="rect">
+            <a:avLst/>
+          </a:prstGeom>
+          <a:noFill/>
+          <a:ln>
+            <a:solidFill>
+              <a:srgbClr val="C00000"/>
+            </a:solidFill>
+          </a:ln>
+        </p:spPr>
+        <p:txBody>
+          <a:bodyPr wrap="square" rtlCol="0">
+            <a:spAutoFit/>
+          </a:bodyPr>
+          <a:p>
+            <a:r>
+              <a:rPr lang="en-US" altLang="zh-CN" sz="1400"/>
+              <a:t>gantt</a:t>
+            </a:r>
+            <a:endParaRPr lang="en-US" altLang="zh-CN" sz="1400"/>
+          </a:p>
+          <a:p>
+            <a:r>
+              <a:rPr lang="en-US" altLang="zh-CN" sz="1400"/>
+              <a:t>   title Example Gantt Chart</a:t>
+            </a:r>
+            <a:endParaRPr lang="en-US" altLang="zh-CN" sz="1400"/>
+          </a:p>
+          <a:p>
+            <a:r>
+              <a:rPr lang="en-US" altLang="zh-CN" sz="1400"/>
+              <a:t>   dateFormat  YYYY-MM-DD</a:t>
+            </a:r>
+            <a:endParaRPr lang="en-US" altLang="zh-CN" sz="1400"/>
+          </a:p>
+          <a:p>
+            <a:r>
+              <a:rPr lang="en-US" altLang="zh-CN" sz="1400"/>
+              <a:t>   section Section</a:t>
+            </a:r>
+            <a:endParaRPr lang="en-US" altLang="zh-CN" sz="1400"/>
+          </a:p>
+          <a:p>
+            <a:r>
+              <a:rPr lang="en-US" altLang="zh-CN" sz="1400"/>
+              <a:t>   task 1: 2019-01-01, 30d</a:t>
+            </a:r>
+            <a:endParaRPr lang="en-US" altLang="zh-CN" sz="1400"/>
+          </a:p>
+          <a:p>
+            <a:r>
+              <a:rPr lang="en-US" altLang="zh-CN" sz="1400"/>
+              <a:t>   task 2: 2019-02-01, 14d</a:t>
+            </a:r>
+            <a:endParaRPr lang="en-US" altLang="zh-CN" sz="1400"/>
+          </a:p>
+          <a:p>
+            <a:r>
+              <a:rPr lang="en-US" altLang="zh-CN" sz="1400"/>
+              <a:t>   task 3: 2019-03-01, 7d</a:t>
+            </a:r>
+            <a:endParaRPr lang="en-US" altLang="zh-CN" sz="1400"/>
+          </a:p>
+        </p:txBody>
+      </p:sp>
+      <p:sp>
+        <p:nvSpPr>
+          <p:cNvPr id="7" name="文本框 6"/>
+          <p:cNvSpPr txBox="1"/>
+          <p:nvPr/>
+        </p:nvSpPr>
+        <p:spPr>
+          <a:xfrm>
+            <a:off x="7106920" y="2691130"/>
+            <a:ext cx="1814195" cy="1383665"/>
+          </a:xfrm>
+          <a:prstGeom prst="rect">
+            <a:avLst/>
+          </a:prstGeom>
+          <a:noFill/>
+          <a:ln>
+            <a:solidFill>
+              <a:srgbClr val="C00000"/>
+            </a:solidFill>
+          </a:ln>
+        </p:spPr>
+        <p:txBody>
+          <a:bodyPr wrap="square" rtlCol="0">
+            <a:spAutoFit/>
+          </a:bodyPr>
+          <a:p>
+            <a:r>
+              <a:rPr lang="en-US" altLang="zh-CN" sz="1400"/>
+              <a:t>pie</a:t>
+            </a:r>
+            <a:endParaRPr lang="en-US" altLang="zh-CN" sz="1400"/>
+          </a:p>
+          <a:p>
+            <a:r>
+              <a:rPr lang="en-US" altLang="zh-CN" sz="1400"/>
+              <a:t>   title Example Pie Chart</a:t>
+            </a:r>
+            <a:endParaRPr lang="en-US" altLang="zh-CN" sz="1400"/>
+          </a:p>
+          <a:p>
+            <a:r>
+              <a:rPr lang="en-US" altLang="zh-CN" sz="1400"/>
+              <a:t>   "First slice": 30</a:t>
+            </a:r>
+            <a:endParaRPr lang="en-US" altLang="zh-CN" sz="1400"/>
+          </a:p>
+          <a:p>
+            <a:r>
+              <a:rPr lang="en-US" altLang="zh-CN" sz="1400"/>
+              <a:t>   "Second slice": 20</a:t>
+            </a:r>
+            <a:endParaRPr lang="en-US" altLang="zh-CN" sz="1400"/>
+          </a:p>
+          <a:p>
+            <a:r>
+              <a:rPr lang="en-US" altLang="zh-CN" sz="1400"/>
+              <a:t>   "Third slice": 50</a:t>
+            </a:r>
+            <a:endParaRPr lang="en-US" altLang="zh-CN" sz="1400"/>
+          </a:p>
+        </p:txBody>
+      </p:sp>
+    </p:spTree>
+    <p:custDataLst>
+      <p:tags r:id="rId1"/>
+    </p:custDataLst>
+  </p:cSld>
+  <p:clrMapOvr>
+    <a:masterClrMapping/>
+  </p:clrMapOvr>
+</p:sld>
+</file>
+
+<file path=ppt/slides/slide11.xml><?xml version="1.0" encoding="utf-8"?>
+<p:sld xmlns:a="http://schemas.openxmlformats.org/drawingml/2006/main" xmlns:r="http://schemas.openxmlformats.org/officeDocument/2006/relationships" xmlns:p="http://schemas.openxmlformats.org/presentationml/2006/main">
+  <p:cSld>
+    <p:spTree>
+      <p:nvGrpSpPr>
+        <p:cNvPr id="1" name=""/>
+        <p:cNvGrpSpPr/>
+        <p:nvPr/>
+      </p:nvGrpSpPr>
+      <p:grpSpPr/>
+      <p:sp>
+        <p:nvSpPr>
+          <p:cNvPr id="2" name="标题 1"/>
+          <p:cNvSpPr>
+            <a:spLocks noGrp="1"/>
+          </p:cNvSpPr>
+          <p:nvPr>
+            <p:ph type="title"/>
+          </p:nvPr>
+        </p:nvSpPr>
+        <p:spPr/>
+        <p:txBody>
+          <a:bodyPr/>
+          <a:p>
+            <a:r>
+              <a:rPr lang="en-US" altLang="zh-CN"/>
+              <a:t>Tools</a:t>
+            </a:r>
+            <a:endParaRPr lang="en-US" altLang="zh-CN"/>
+          </a:p>
+        </p:txBody>
+      </p:sp>
+      <p:sp>
+        <p:nvSpPr>
+          <p:cNvPr id="3" name="内容占位符 2"/>
+          <p:cNvSpPr>
+            <a:spLocks noGrp="1"/>
+          </p:cNvSpPr>
+          <p:nvPr>
+            <p:ph idx="1"/>
+          </p:nvPr>
+        </p:nvSpPr>
+        <p:spPr/>
+        <p:txBody>
+          <a:bodyPr/>
+          <a:p>
+            <a:r>
+              <a:rPr lang="en-US" altLang="zh-CN"/>
+              <a:t>https://github.com/mermaid-js/mermaid-cli</a:t>
+            </a:r>
+            <a:endParaRPr lang="en-US" altLang="zh-CN"/>
+          </a:p>
+          <a:p>
+            <a:pPr lvl="1"/>
+            <a:r>
+              <a:rPr lang="en-US" altLang="zh-CN"/>
+              <a:t>npm install -g @mermaid-js/mermaid-cli</a:t>
+            </a:r>
+            <a:endParaRPr lang="en-US" altLang="zh-CN"/>
+          </a:p>
+          <a:p>
+            <a:pPr lvl="1"/>
+            <a:r>
+              <a:rPr lang="en-US" altLang="zh-CN"/>
+              <a:t>mmdc -i input.mmd -o output.svg</a:t>
+            </a:r>
+            <a:endParaRPr lang="en-US" altLang="zh-CN"/>
+          </a:p>
+        </p:txBody>
+      </p:sp>
+    </p:spTree>
+    <p:custDataLst>
+      <p:tags r:id="rId1"/>
+    </p:custDataLst>
+  </p:cSld>
+  <p:clrMapOvr>
+    <a:masterClrMapping/>
+  </p:clrMapOvr>
+</p:sld>
+</file>
+
+<file path=ppt/slides/slide12.xml><?xml version="1.0" encoding="utf-8"?>
+<p:sld xmlns:a="http://schemas.openxmlformats.org/drawingml/2006/main" xmlns:r="http://schemas.openxmlformats.org/officeDocument/2006/relationships" xmlns:p="http://schemas.openxmlformats.org/presentationml/2006/main">
+  <p:cSld>
+    <p:spTree>
+      <p:nvGrpSpPr>
+        <p:cNvPr id="1" name=""/>
+        <p:cNvGrpSpPr/>
+        <p:nvPr/>
+      </p:nvGrpSpPr>
+      <p:grpSpPr>
+        <a:xfrm>
+          <a:off x="0" y="0"/>
+          <a:ext cx="0" cy="0"/>
+          <a:chOff x="0" y="0"/>
+          <a:chExt cx="0" cy="0"/>
+        </a:xfrm>
+      </p:grpSpPr>
+      <p:sp>
+        <p:nvSpPr>
+          <p:cNvPr id="2" name="标题 1"/>
+          <p:cNvSpPr>
+            <a:spLocks noGrp="1"/>
+          </p:cNvSpPr>
+          <p:nvPr>
+            <p:ph type="title"/>
+            <p:custDataLst>
+              <p:tags r:id="rId1"/>
+            </p:custDataLst>
+          </p:nvPr>
+        </p:nvSpPr>
+        <p:spPr/>
+        <p:txBody>
+          <a:bodyPr/>
+          <a:lstStyle/>
+          <a:p>
+            <a:r>
+              <a:rPr lang="en-US" altLang="zh-CN" smtClean="0"/>
+              <a:t>THANKS</a:t>
+            </a:r>
+            <a:endParaRPr lang="en-US" altLang="zh-CN" smtClean="0"/>
+          </a:p>
+        </p:txBody>
+      </p:sp>
+      <p:sp>
+        <p:nvSpPr>
+          <p:cNvPr id="3" name="文本占位符 2"/>
+          <p:cNvSpPr>
+            <a:spLocks noGrp="1"/>
+          </p:cNvSpPr>
+          <p:nvPr>
+            <p:ph sz="quarter" idx="13"/>
+            <p:custDataLst>
+              <p:tags r:id="rId2"/>
+            </p:custDataLst>
+          </p:nvPr>
+        </p:nvSpPr>
+        <p:spPr/>
+        <p:txBody>
+          <a:bodyPr>
+            <a:normAutofit/>
+          </a:bodyPr>
+          <a:lstStyle/>
+          <a:p>
+            <a:r>
+              <a:rPr lang="zh-CN" altLang="en-US" smtClean="0"/>
+              <a:t>谢谢聆听</a:t>
+            </a:r>
+            <a:endParaRPr lang="zh-CN" altLang="en-US" smtClean="0"/>
+          </a:p>
+        </p:txBody>
+      </p:sp>
+    </p:spTree>
+    <p:custDataLst>
+      <p:tags r:id="rId3"/>
+    </p:custDataLst>
+  </p:cSld>
+  <p:clrMapOvr>
+    <a:masterClrMapping/>
+  </p:clrMapOvr>
+  <p:timing>
+    <p:tnLst>
+      <p:par>
+        <p:cTn id="1" dur="indefinite" restart="never" nodeType="tmRoot"/>
+      </p:par>
+    </p:tnLst>
+  </p:timing>
+</p:sld>
+</file>
+
 <file path=ppt/slides/slide2.xml><?xml version="1.0" encoding="utf-8"?>
 <p:sld xmlns:a="http://schemas.openxmlformats.org/drawingml/2006/main" xmlns:r="http://schemas.openxmlformats.org/officeDocument/2006/relationships" xmlns:p="http://schemas.openxmlformats.org/presentationml/2006/main">
   <p:cSld>
@@ -4369,83 +5068,654 @@
         <p:cNvGrpSpPr/>
         <p:nvPr/>
       </p:nvGrpSpPr>
-      <p:grpSpPr>
-        <a:xfrm>
-          <a:off x="0" y="0"/>
-          <a:ext cx="0" cy="0"/>
-          <a:chOff x="0" y="0"/>
-          <a:chExt cx="0" cy="0"/>
-        </a:xfrm>
-      </p:grpSpPr>
-      <p:sp>
-        <p:nvSpPr>
-          <p:cNvPr id="2" name="标题 1"/>
+      <p:grpSpPr/>
+      <p:sp>
+        <p:nvSpPr>
+          <p:cNvPr id="4" name="标题 3"/>
           <p:cNvSpPr>
             <a:spLocks noGrp="1"/>
           </p:cNvSpPr>
           <p:nvPr>
             <p:ph type="title"/>
-            <p:custDataLst>
-              <p:tags r:id="rId1"/>
-            </p:custDataLst>
           </p:nvPr>
         </p:nvSpPr>
         <p:spPr/>
         <p:txBody>
           <a:bodyPr/>
-          <a:lstStyle/>
-          <a:p>
-            <a:r>
-              <a:rPr lang="en-US" altLang="zh-CN" smtClean="0"/>
-              <a:t>THANKS</a:t>
-            </a:r>
-            <a:endParaRPr lang="en-US" altLang="zh-CN" smtClean="0"/>
-          </a:p>
-        </p:txBody>
-      </p:sp>
-      <p:sp>
-        <p:nvSpPr>
-          <p:cNvPr id="3" name="文本占位符 2"/>
-          <p:cNvSpPr>
-            <a:spLocks noGrp="1"/>
-          </p:cNvSpPr>
-          <p:nvPr>
-            <p:ph sz="quarter" idx="13"/>
-            <p:custDataLst>
-              <p:tags r:id="rId2"/>
-            </p:custDataLst>
+          <a:p>
+            <a:r>
+              <a:rPr lang="en-US" altLang="zh-CN"/>
+              <a:t>Mark</a:t>
+            </a:r>
+            <a:r>
+              <a:rPr lang="en-US" altLang="zh-CN"/>
+              <a:t>Down</a:t>
+            </a:r>
+            <a:endParaRPr lang="en-US" altLang="zh-CN"/>
+          </a:p>
+        </p:txBody>
+      </p:sp>
+      <p:sp>
+        <p:nvSpPr>
+          <p:cNvPr id="5" name="文本占位符 4"/>
+          <p:cNvSpPr>
+            <a:spLocks noGrp="1"/>
+          </p:cNvSpPr>
+          <p:nvPr>
+            <p:ph type="body" idx="1"/>
           </p:nvPr>
         </p:nvSpPr>
         <p:spPr/>
         <p:txBody>
-          <a:bodyPr>
-            <a:normAutofit/>
-          </a:bodyPr>
-          <a:lstStyle/>
-          <a:p>
-            <a:r>
-              <a:rPr lang="zh-CN" altLang="en-US" smtClean="0"/>
-              <a:t>谢谢聆听</a:t>
-            </a:r>
-            <a:endParaRPr lang="zh-CN" altLang="en-US" smtClean="0"/>
+          <a:bodyPr/>
+          <a:p>
+            <a:endParaRPr lang="zh-CN" altLang="en-US"/>
           </a:p>
         </p:txBody>
       </p:sp>
     </p:spTree>
     <p:custDataLst>
-      <p:tags r:id="rId3"/>
+      <p:tags r:id="rId1"/>
     </p:custDataLst>
   </p:cSld>
   <p:clrMapOvr>
     <a:masterClrMapping/>
   </p:clrMapOvr>
-  <p:timing>
-    <p:tnLst>
-      <p:par>
-        <p:cTn id="1" dur="indefinite" restart="never" nodeType="tmRoot"/>
-      </p:par>
-    </p:tnLst>
-  </p:timing>
+</p:sld>
+</file>
+
+<file path=ppt/slides/slide8.xml><?xml version="1.0" encoding="utf-8"?>
+<p:sld xmlns:a="http://schemas.openxmlformats.org/drawingml/2006/main" xmlns:r="http://schemas.openxmlformats.org/officeDocument/2006/relationships" xmlns:p="http://schemas.openxmlformats.org/presentationml/2006/main">
+  <p:cSld>
+    <p:spTree>
+      <p:nvGrpSpPr>
+        <p:cNvPr id="1" name=""/>
+        <p:cNvGrpSpPr/>
+        <p:nvPr/>
+      </p:nvGrpSpPr>
+      <p:grpSpPr/>
+      <p:sp>
+        <p:nvSpPr>
+          <p:cNvPr id="2" name="标题 1"/>
+          <p:cNvSpPr>
+            <a:spLocks noGrp="1"/>
+          </p:cNvSpPr>
+          <p:nvPr>
+            <p:ph type="title"/>
+          </p:nvPr>
+        </p:nvSpPr>
+        <p:spPr/>
+        <p:txBody>
+          <a:bodyPr/>
+          <a:p>
+            <a:r>
+              <a:rPr lang="en-US" altLang="zh-CN"/>
+              <a:t>Intro</a:t>
+            </a:r>
+            <a:endParaRPr lang="en-US" altLang="zh-CN"/>
+          </a:p>
+        </p:txBody>
+      </p:sp>
+      <p:sp>
+        <p:nvSpPr>
+          <p:cNvPr id="3" name="内容占位符 2"/>
+          <p:cNvSpPr>
+            <a:spLocks noGrp="1"/>
+          </p:cNvSpPr>
+          <p:nvPr>
+            <p:ph idx="1"/>
+          </p:nvPr>
+        </p:nvSpPr>
+        <p:spPr>
+          <a:xfrm>
+            <a:off x="838200" y="1211580"/>
+            <a:ext cx="4920615" cy="4878705"/>
+          </a:xfrm>
+        </p:spPr>
+        <p:txBody>
+          <a:bodyPr>
+            <a:normAutofit fontScale="60000"/>
+          </a:bodyPr>
+          <a:p>
+            <a:r>
+              <a:rPr lang="en-US" altLang="zh-CN"/>
+              <a:t>Formatting</a:t>
+            </a:r>
+            <a:endParaRPr lang="en-US" altLang="zh-CN"/>
+          </a:p>
+          <a:p>
+            <a:pPr lvl="1"/>
+            <a:r>
+              <a:rPr lang="en-US" altLang="zh-CN" sz="2000"/>
+              <a:t>**Bold**</a:t>
+            </a:r>
+            <a:endParaRPr lang="en-US" altLang="zh-CN" sz="2000"/>
+          </a:p>
+          <a:p>
+            <a:pPr lvl="1"/>
+            <a:r>
+              <a:rPr lang="en-US" altLang="zh-CN" sz="2000"/>
+              <a:t>*Italic*</a:t>
+            </a:r>
+            <a:endParaRPr lang="en-US" altLang="zh-CN" sz="2000"/>
+          </a:p>
+          <a:p>
+            <a:pPr lvl="1"/>
+            <a:r>
+              <a:rPr lang="en-US" altLang="zh-CN" sz="2000"/>
+              <a:t>***Bold &amp; Italic***</a:t>
+            </a:r>
+            <a:endParaRPr lang="en-US" altLang="zh-CN" sz="2000"/>
+          </a:p>
+          <a:p>
+            <a:pPr lvl="1"/>
+            <a:r>
+              <a:rPr lang="en-US" altLang="zh-CN" sz="2000"/>
+              <a:t>`inline code`</a:t>
+            </a:r>
+            <a:endParaRPr lang="en-US" altLang="zh-CN" sz="2000"/>
+          </a:p>
+          <a:p>
+            <a:pPr lvl="0"/>
+            <a:r>
+              <a:rPr lang="en-US" altLang="zh-CN"/>
+              <a:t>Headers</a:t>
+            </a:r>
+            <a:endParaRPr lang="en-US" altLang="zh-CN"/>
+          </a:p>
+          <a:p>
+            <a:pPr lvl="1"/>
+            <a:r>
+              <a:rPr lang="en-US" altLang="zh-CN" sz="2000"/>
+              <a:t># H1</a:t>
+            </a:r>
+            <a:endParaRPr lang="en-US" altLang="zh-CN" sz="2000"/>
+          </a:p>
+          <a:p>
+            <a:pPr lvl="1"/>
+            <a:r>
+              <a:rPr lang="en-US" altLang="zh-CN" sz="2000"/>
+              <a:t>## H2</a:t>
+            </a:r>
+            <a:endParaRPr lang="en-US" altLang="zh-CN" sz="2000"/>
+          </a:p>
+          <a:p>
+            <a:pPr lvl="1"/>
+            <a:r>
+              <a:rPr lang="en-US" altLang="zh-CN" sz="2000"/>
+              <a:t>### H3</a:t>
+            </a:r>
+            <a:endParaRPr lang="en-US" altLang="zh-CN" sz="2000"/>
+          </a:p>
+          <a:p>
+            <a:pPr lvl="0"/>
+            <a:r>
+              <a:rPr lang="en-US" altLang="zh-CN" sz="2400"/>
+              <a:t>Unordered list</a:t>
+            </a:r>
+            <a:endParaRPr lang="en-US" altLang="zh-CN" sz="2400"/>
+          </a:p>
+          <a:p>
+            <a:pPr lvl="1"/>
+            <a:r>
+              <a:rPr lang="en-US" altLang="zh-CN"/>
+              <a:t>- Item</a:t>
+            </a:r>
+            <a:endParaRPr lang="en-US" altLang="zh-CN"/>
+          </a:p>
+          <a:p>
+            <a:pPr lvl="0"/>
+            <a:r>
+              <a:rPr lang="en-US" altLang="zh-CN" sz="2400"/>
+              <a:t>Ordered list</a:t>
+            </a:r>
+            <a:endParaRPr lang="en-US" altLang="zh-CN" sz="2400"/>
+          </a:p>
+          <a:p>
+            <a:pPr lvl="1"/>
+            <a:r>
+              <a:rPr lang="en-US" altLang="zh-CN"/>
+              <a:t>1. First</a:t>
+            </a:r>
+            <a:endParaRPr lang="en-US" altLang="zh-CN"/>
+          </a:p>
+          <a:p>
+            <a:pPr lvl="0"/>
+            <a:r>
+              <a:rPr lang="en-US" altLang="zh-CN"/>
+              <a:t>Task list</a:t>
+            </a:r>
+            <a:endParaRPr lang="en-US" altLang="zh-CN"/>
+          </a:p>
+          <a:p>
+            <a:pPr lvl="1"/>
+            <a:r>
+              <a:rPr lang="en-US" altLang="zh-CN"/>
+              <a:t>- [ ] Unchecked</a:t>
+            </a:r>
+            <a:endParaRPr lang="en-US" altLang="zh-CN"/>
+          </a:p>
+          <a:p>
+            <a:pPr lvl="1"/>
+            <a:r>
+              <a:rPr lang="en-US" altLang="zh-CN"/>
+              <a:t>- [x] Checked</a:t>
+            </a:r>
+            <a:endParaRPr lang="en-US" altLang="zh-CN"/>
+          </a:p>
+          <a:p>
+            <a:pPr lvl="0"/>
+            <a:r>
+              <a:rPr lang="en-US" altLang="zh-CN" sz="2400"/>
+              <a:t>Links</a:t>
+            </a:r>
+            <a:endParaRPr lang="en-US" altLang="zh-CN" sz="2400"/>
+          </a:p>
+          <a:p>
+            <a:pPr lvl="1"/>
+            <a:r>
+              <a:rPr lang="en-US" altLang="zh-CN" sz="2000"/>
+              <a:t>[Link text] (https://example.com)</a:t>
+            </a:r>
+            <a:endParaRPr lang="en-US" altLang="zh-CN"/>
+          </a:p>
+          <a:p>
+            <a:pPr lvl="1"/>
+            <a:endParaRPr lang="en-US" altLang="zh-CN"/>
+          </a:p>
+        </p:txBody>
+      </p:sp>
+      <p:sp>
+        <p:nvSpPr>
+          <p:cNvPr id="4" name="内容占位符 2"/>
+          <p:cNvSpPr>
+            <a:spLocks noGrp="1"/>
+          </p:cNvSpPr>
+          <p:nvPr/>
+        </p:nvSpPr>
+        <p:spPr>
+          <a:xfrm>
+            <a:off x="6507480" y="1211580"/>
+            <a:ext cx="4920615" cy="4878705"/>
+          </a:xfrm>
+          <a:prstGeom prst="rect">
+            <a:avLst/>
+          </a:prstGeom>
+        </p:spPr>
+        <p:txBody>
+          <a:bodyPr vert="horz" lIns="91440" tIns="45720" rIns="91440" bIns="45720" rtlCol="0">
+            <a:normAutofit fontScale="90000" lnSpcReduction="20000"/>
+          </a:bodyPr>
+          <a:lstStyle>
+            <a:lvl1pPr marL="342900" indent="-342900" algn="l" defTabSz="914400" rtl="0" eaLnBrk="1" latinLnBrk="0" hangingPunct="1">
+              <a:lnSpc>
+                <a:spcPct val="90000"/>
+              </a:lnSpc>
+              <a:spcBef>
+                <a:spcPts val="1000"/>
+              </a:spcBef>
+              <a:buFont typeface="黑体" panose="02010609060101010101" pitchFamily="49" charset="-122"/>
+              <a:buChar char="〉"/>
+              <a:defRPr sz="2400" kern="1200">
+                <a:solidFill>
+                  <a:schemeClr val="tx1"/>
+                </a:solidFill>
+                <a:latin typeface="+mn-lt"/>
+                <a:ea typeface="+mn-ea"/>
+                <a:cs typeface="+mn-cs"/>
+              </a:defRPr>
+            </a:lvl1pPr>
+            <a:lvl2pPr marL="800100" indent="-342900" algn="l" defTabSz="914400" rtl="0" eaLnBrk="1" latinLnBrk="0" hangingPunct="1">
+              <a:lnSpc>
+                <a:spcPct val="90000"/>
+              </a:lnSpc>
+              <a:spcBef>
+                <a:spcPts val="500"/>
+              </a:spcBef>
+              <a:buFont typeface="Arial" panose="020B0604020202020204" pitchFamily="34" charset="0"/>
+              <a:buChar char="•"/>
+              <a:defRPr sz="2000" kern="1200">
+                <a:solidFill>
+                  <a:schemeClr val="tx1"/>
+                </a:solidFill>
+                <a:latin typeface="+mn-lt"/>
+                <a:ea typeface="+mn-ea"/>
+                <a:cs typeface="+mn-cs"/>
+              </a:defRPr>
+            </a:lvl2pPr>
+            <a:lvl3pPr marL="1257300" indent="-342900" algn="l" defTabSz="914400" rtl="0" eaLnBrk="1" latinLnBrk="0" hangingPunct="1">
+              <a:lnSpc>
+                <a:spcPct val="90000"/>
+              </a:lnSpc>
+              <a:spcBef>
+                <a:spcPts val="500"/>
+              </a:spcBef>
+              <a:buFont typeface="Arial" panose="020B0604020202020204" pitchFamily="34" charset="0"/>
+              <a:buChar char="•"/>
+              <a:defRPr sz="1800" kern="1200">
+                <a:solidFill>
+                  <a:schemeClr val="tx1"/>
+                </a:solidFill>
+                <a:latin typeface="+mn-lt"/>
+                <a:ea typeface="+mn-ea"/>
+                <a:cs typeface="+mn-cs"/>
+              </a:defRPr>
+            </a:lvl3pPr>
+            <a:lvl4pPr marL="1657350" indent="-285750" algn="l" defTabSz="914400" rtl="0" eaLnBrk="1" latinLnBrk="0" hangingPunct="1">
+              <a:lnSpc>
+                <a:spcPct val="90000"/>
+              </a:lnSpc>
+              <a:spcBef>
+                <a:spcPts val="500"/>
+              </a:spcBef>
+              <a:buFont typeface="Arial" panose="020B0604020202020204" pitchFamily="34" charset="0"/>
+              <a:buChar char="•"/>
+              <a:defRPr sz="1800" kern="1200">
+                <a:solidFill>
+                  <a:schemeClr val="tx1"/>
+                </a:solidFill>
+                <a:latin typeface="+mn-lt"/>
+                <a:ea typeface="+mn-ea"/>
+                <a:cs typeface="+mn-cs"/>
+              </a:defRPr>
+            </a:lvl4pPr>
+            <a:lvl5pPr marL="2114550" indent="-285750" algn="l" defTabSz="914400" rtl="0" eaLnBrk="1" latinLnBrk="0" hangingPunct="1">
+              <a:lnSpc>
+                <a:spcPct val="90000"/>
+              </a:lnSpc>
+              <a:spcBef>
+                <a:spcPts val="500"/>
+              </a:spcBef>
+              <a:buFont typeface="Arial" panose="020B0604020202020204" pitchFamily="34" charset="0"/>
+              <a:buChar char="•"/>
+              <a:defRPr sz="1800" kern="1200">
+                <a:solidFill>
+                  <a:schemeClr val="tx1"/>
+                </a:solidFill>
+                <a:latin typeface="+mn-lt"/>
+                <a:ea typeface="+mn-ea"/>
+                <a:cs typeface="+mn-cs"/>
+              </a:defRPr>
+            </a:lvl5pPr>
+            <a:lvl6pPr marL="2514600" indent="-228600" algn="l" defTabSz="914400" rtl="0" eaLnBrk="1" latinLnBrk="0" hangingPunct="1">
+              <a:lnSpc>
+                <a:spcPct val="90000"/>
+              </a:lnSpc>
+              <a:spcBef>
+                <a:spcPts val="500"/>
+              </a:spcBef>
+              <a:buFont typeface="Arial" panose="020B0604020202020204" pitchFamily="34" charset="0"/>
+              <a:buChar char="•"/>
+              <a:defRPr sz="1800" kern="1200">
+                <a:solidFill>
+                  <a:schemeClr val="tx1"/>
+                </a:solidFill>
+                <a:latin typeface="+mn-lt"/>
+                <a:ea typeface="+mn-ea"/>
+                <a:cs typeface="+mn-cs"/>
+              </a:defRPr>
+            </a:lvl6pPr>
+            <a:lvl7pPr marL="2971800" indent="-228600" algn="l" defTabSz="914400" rtl="0" eaLnBrk="1" latinLnBrk="0" hangingPunct="1">
+              <a:lnSpc>
+                <a:spcPct val="90000"/>
+              </a:lnSpc>
+              <a:spcBef>
+                <a:spcPts val="500"/>
+              </a:spcBef>
+              <a:buFont typeface="Arial" panose="020B0604020202020204" pitchFamily="34" charset="0"/>
+              <a:buChar char="•"/>
+              <a:defRPr sz="1800" kern="1200">
+                <a:solidFill>
+                  <a:schemeClr val="tx1"/>
+                </a:solidFill>
+                <a:latin typeface="+mn-lt"/>
+                <a:ea typeface="+mn-ea"/>
+                <a:cs typeface="+mn-cs"/>
+              </a:defRPr>
+            </a:lvl7pPr>
+            <a:lvl8pPr marL="3429000" indent="-228600" algn="l" defTabSz="914400" rtl="0" eaLnBrk="1" latinLnBrk="0" hangingPunct="1">
+              <a:lnSpc>
+                <a:spcPct val="90000"/>
+              </a:lnSpc>
+              <a:spcBef>
+                <a:spcPts val="500"/>
+              </a:spcBef>
+              <a:buFont typeface="Arial" panose="020B0604020202020204" pitchFamily="34" charset="0"/>
+              <a:buChar char="•"/>
+              <a:defRPr sz="1800" kern="1200">
+                <a:solidFill>
+                  <a:schemeClr val="tx1"/>
+                </a:solidFill>
+                <a:latin typeface="+mn-lt"/>
+                <a:ea typeface="+mn-ea"/>
+                <a:cs typeface="+mn-cs"/>
+              </a:defRPr>
+            </a:lvl8pPr>
+            <a:lvl9pPr marL="3886200" indent="-228600" algn="l" defTabSz="914400" rtl="0" eaLnBrk="1" latinLnBrk="0" hangingPunct="1">
+              <a:lnSpc>
+                <a:spcPct val="90000"/>
+              </a:lnSpc>
+              <a:spcBef>
+                <a:spcPts val="500"/>
+              </a:spcBef>
+              <a:buFont typeface="Arial" panose="020B0604020202020204" pitchFamily="34" charset="0"/>
+              <a:buChar char="•"/>
+              <a:defRPr sz="1800" kern="1200">
+                <a:solidFill>
+                  <a:schemeClr val="tx1"/>
+                </a:solidFill>
+                <a:latin typeface="+mn-lt"/>
+                <a:ea typeface="+mn-ea"/>
+                <a:cs typeface="+mn-cs"/>
+              </a:defRPr>
+            </a:lvl9pPr>
+          </a:lstStyle>
+          <a:p>
+            <a:r>
+              <a:rPr lang="en-US" altLang="zh-CN"/>
+              <a:t>Code Blocks</a:t>
+            </a:r>
+            <a:endParaRPr lang="en-US" altLang="zh-CN"/>
+          </a:p>
+          <a:p>
+            <a:pPr lvl="1"/>
+            <a:r>
+              <a:rPr lang="en-US" altLang="zh-CN"/>
+              <a:t>inline</a:t>
+            </a:r>
+            <a:endParaRPr lang="en-US" altLang="zh-CN"/>
+          </a:p>
+          <a:p>
+            <a:pPr lvl="2"/>
+            <a:r>
+              <a:rPr lang="en-US" altLang="zh-CN"/>
+              <a:t>`a line of code`</a:t>
+            </a:r>
+            <a:endParaRPr lang="en-US" altLang="zh-CN"/>
+          </a:p>
+          <a:p>
+            <a:pPr lvl="1"/>
+            <a:r>
+              <a:rPr lang="en-US" altLang="zh-CN"/>
+              <a:t>Fenced block</a:t>
+            </a:r>
+            <a:endParaRPr lang="en-US" altLang="zh-CN"/>
+          </a:p>
+          <a:p>
+            <a:pPr lvl="2"/>
+            <a:r>
+              <a:rPr lang="en-US" altLang="zh-CN"/>
+              <a:t>```python</a:t>
+            </a:r>
+            <a:endParaRPr lang="en-US" altLang="zh-CN"/>
+          </a:p>
+          <a:p>
+            <a:pPr lvl="2"/>
+            <a:r>
+              <a:rPr lang="en-US" altLang="zh-CN"/>
+              <a:t>```</a:t>
+            </a:r>
+            <a:endParaRPr lang="en-US" altLang="zh-CN"/>
+          </a:p>
+          <a:p>
+            <a:pPr lvl="0"/>
+            <a:r>
+              <a:rPr lang="en-US" altLang="zh-CN"/>
+              <a:t>Tables</a:t>
+            </a:r>
+            <a:endParaRPr lang="en-US" altLang="zh-CN"/>
+          </a:p>
+          <a:p>
+            <a:pPr lvl="1"/>
+            <a:r>
+              <a:rPr lang="en-US" altLang="zh-CN"/>
+              <a:t>|Column1|Column2|</a:t>
+            </a:r>
+            <a:endParaRPr lang="en-US" altLang="zh-CN"/>
+          </a:p>
+          <a:p>
+            <a:pPr lvl="1"/>
+            <a:r>
+              <a:rPr lang="en-US" altLang="zh-CN"/>
+              <a:t>|Cell        |Cell         |</a:t>
+            </a:r>
+            <a:endParaRPr lang="en-US" altLang="zh-CN"/>
+          </a:p>
+          <a:p>
+            <a:pPr lvl="0"/>
+            <a:r>
+              <a:rPr lang="en-US" altLang="zh-CN"/>
+              <a:t>Horizontal rules</a:t>
+            </a:r>
+            <a:endParaRPr lang="en-US" altLang="zh-CN"/>
+          </a:p>
+          <a:p>
+            <a:pPr lvl="1"/>
+            <a:r>
+              <a:rPr lang="en-US" altLang="zh-CN"/>
+              <a:t>---</a:t>
+            </a:r>
+            <a:endParaRPr lang="en-US" altLang="zh-CN"/>
+          </a:p>
+          <a:p>
+            <a:pPr lvl="1"/>
+            <a:r>
+              <a:rPr lang="en-US" altLang="zh-CN"/>
+              <a:t>***</a:t>
+            </a:r>
+            <a:endParaRPr lang="en-US" altLang="zh-CN"/>
+          </a:p>
+          <a:p>
+            <a:pPr lvl="1"/>
+            <a:r>
+              <a:rPr lang="en-US" altLang="zh-CN"/>
+              <a:t>___</a:t>
+            </a:r>
+            <a:endParaRPr lang="en-US" altLang="zh-CN"/>
+          </a:p>
+          <a:p>
+            <a:pPr lvl="0"/>
+            <a:r>
+              <a:rPr lang="en-US" altLang="zh-CN"/>
+              <a:t>Escape</a:t>
+            </a:r>
+            <a:endParaRPr lang="en-US" altLang="zh-CN"/>
+          </a:p>
+          <a:p>
+            <a:pPr lvl="1"/>
+            <a:r>
+              <a:rPr lang="en-US" altLang="zh-CN"/>
+              <a:t>\</a:t>
+            </a:r>
+            <a:endParaRPr lang="en-US" altLang="zh-CN"/>
+          </a:p>
+          <a:p>
+            <a:pPr lvl="0"/>
+            <a:r>
+              <a:rPr lang="en-US" altLang="zh-CN"/>
+              <a:t>Emoji</a:t>
+            </a:r>
+            <a:endParaRPr lang="en-US" altLang="zh-CN"/>
+          </a:p>
+          <a:p>
+            <a:pPr lvl="1"/>
+            <a:r>
+              <a:rPr lang="en-US" altLang="zh-CN"/>
+              <a:t>:smile :rocket :warning</a:t>
+            </a:r>
+            <a:endParaRPr lang="en-US" altLang="zh-CN"/>
+          </a:p>
+        </p:txBody>
+      </p:sp>
+    </p:spTree>
+    <p:custDataLst>
+      <p:tags r:id="rId1"/>
+    </p:custDataLst>
+  </p:cSld>
+  <p:clrMapOvr>
+    <a:masterClrMapping/>
+  </p:clrMapOvr>
+</p:sld>
+</file>
+
+<file path=ppt/slides/slide9.xml><?xml version="1.0" encoding="utf-8"?>
+<p:sld xmlns:a="http://schemas.openxmlformats.org/drawingml/2006/main" xmlns:r="http://schemas.openxmlformats.org/officeDocument/2006/relationships" xmlns:p="http://schemas.openxmlformats.org/presentationml/2006/main">
+  <p:cSld>
+    <p:spTree>
+      <p:nvGrpSpPr>
+        <p:cNvPr id="1" name=""/>
+        <p:cNvGrpSpPr/>
+        <p:nvPr/>
+      </p:nvGrpSpPr>
+      <p:grpSpPr/>
+      <p:sp>
+        <p:nvSpPr>
+          <p:cNvPr id="4" name="标题 3"/>
+          <p:cNvSpPr>
+            <a:spLocks noGrp="1"/>
+          </p:cNvSpPr>
+          <p:nvPr>
+            <p:ph type="title"/>
+          </p:nvPr>
+        </p:nvSpPr>
+        <p:spPr/>
+        <p:txBody>
+          <a:bodyPr/>
+          <a:p>
+            <a:r>
+              <a:rPr lang="en-US" altLang="zh-CN"/>
+              <a:t>Mermaid</a:t>
+            </a:r>
+            <a:endParaRPr lang="en-US" altLang="zh-CN"/>
+          </a:p>
+        </p:txBody>
+      </p:sp>
+      <p:sp>
+        <p:nvSpPr>
+          <p:cNvPr id="5" name="文本占位符 4"/>
+          <p:cNvSpPr>
+            <a:spLocks noGrp="1"/>
+          </p:cNvSpPr>
+          <p:nvPr>
+            <p:ph type="body" idx="1"/>
+          </p:nvPr>
+        </p:nvSpPr>
+        <p:spPr/>
+        <p:txBody>
+          <a:bodyPr/>
+          <a:p>
+            <a:endParaRPr lang="zh-CN" altLang="en-US"/>
+          </a:p>
+        </p:txBody>
+      </p:sp>
+    </p:spTree>
+    <p:custDataLst>
+      <p:tags r:id="rId1"/>
+    </p:custDataLst>
+  </p:cSld>
+  <p:clrMapOvr>
+    <a:masterClrMapping/>
+  </p:clrMapOvr>
 </p:sld>
 </file>
 
@@ -4475,6 +5745,46 @@
 
 <file path=ppt/tags/tag12.xml><?xml version="1.0" encoding="utf-8"?>
 <p:tagLst xmlns:p="http://schemas.openxmlformats.org/presentationml/2006/main">
+  <p:tag name="KSO_WM_BEAUTIFY_FLAG" val="#wm#"/>
+  <p:tag name="KSO_WM_TEMPLATE_CATEGORY" val="custom"/>
+  <p:tag name="KSO_WM_TEMPLATE_INDEX" val="160402"/>
+</p:tagLst>
+</file>
+
+<file path=ppt/tags/tag13.xml><?xml version="1.0" encoding="utf-8"?>
+<p:tagLst xmlns:p="http://schemas.openxmlformats.org/presentationml/2006/main">
+  <p:tag name="KSO_WM_BEAUTIFY_FLAG" val="#wm#"/>
+  <p:tag name="KSO_WM_TEMPLATE_CATEGORY" val="custom"/>
+  <p:tag name="KSO_WM_TEMPLATE_INDEX" val="160402"/>
+</p:tagLst>
+</file>
+
+<file path=ppt/tags/tag14.xml><?xml version="1.0" encoding="utf-8"?>
+<p:tagLst xmlns:p="http://schemas.openxmlformats.org/presentationml/2006/main">
+  <p:tag name="KSO_WM_BEAUTIFY_FLAG" val="#wm#"/>
+  <p:tag name="KSO_WM_TEMPLATE_CATEGORY" val="custom"/>
+  <p:tag name="KSO_WM_TEMPLATE_INDEX" val="160402"/>
+</p:tagLst>
+</file>
+
+<file path=ppt/tags/tag15.xml><?xml version="1.0" encoding="utf-8"?>
+<p:tagLst xmlns:p="http://schemas.openxmlformats.org/presentationml/2006/main">
+  <p:tag name="KSO_WM_BEAUTIFY_FLAG" val="#wm#"/>
+  <p:tag name="KSO_WM_TEMPLATE_CATEGORY" val="custom"/>
+  <p:tag name="KSO_WM_TEMPLATE_INDEX" val="160402"/>
+</p:tagLst>
+</file>
+
+<file path=ppt/tags/tag16.xml><?xml version="1.0" encoding="utf-8"?>
+<p:tagLst xmlns:p="http://schemas.openxmlformats.org/presentationml/2006/main">
+  <p:tag name="KSO_WM_BEAUTIFY_FLAG" val="#wm#"/>
+  <p:tag name="KSO_WM_TEMPLATE_CATEGORY" val="custom"/>
+  <p:tag name="KSO_WM_TEMPLATE_INDEX" val="160402"/>
+</p:tagLst>
+</file>
+
+<file path=ppt/tags/tag17.xml><?xml version="1.0" encoding="utf-8"?>
+<p:tagLst xmlns:p="http://schemas.openxmlformats.org/presentationml/2006/main">
   <p:tag name="KSO_WM_TAG_VERSION" val="1.0"/>
   <p:tag name="KSO_WM_BEAUTIFY_FLAG" val="#wm#"/>
   <p:tag name="KSO_WM_TEMPLATE_CATEGORY" val="custom"/>
@@ -4492,7 +5802,7 @@
 </p:tagLst>
 </file>
 
-<file path=ppt/tags/tag13.xml><?xml version="1.0" encoding="utf-8"?>
+<file path=ppt/tags/tag18.xml><?xml version="1.0" encoding="utf-8"?>
 <p:tagLst xmlns:p="http://schemas.openxmlformats.org/presentationml/2006/main">
   <p:tag name="KSO_WM_TAG_VERSION" val="1.0"/>
   <p:tag name="KSO_WM_BEAUTIFY_FLAG" val="#wm#"/>
@@ -4511,7 +5821,7 @@
 </p:tagLst>
 </file>
 
-<file path=ppt/tags/tag14.xml><?xml version="1.0" encoding="utf-8"?>
+<file path=ppt/tags/tag19.xml><?xml version="1.0" encoding="utf-8"?>
 <p:tagLst xmlns:p="http://schemas.openxmlformats.org/presentationml/2006/main">
   <p:tag name="KSO_WM_TEMPLATE_CATEGORY" val="custom"/>
   <p:tag name="KSO_WM_TEMPLATE_INDEX" val="160402"/>
@@ -4526,18 +5836,18 @@
 </p:tagLst>
 </file>
 
-<file path=ppt/tags/tag15.xml><?xml version="1.0" encoding="utf-8"?>
-<p:tagLst xmlns:p="http://schemas.openxmlformats.org/presentationml/2006/main">
-  <p:tag name="KSO_WPP_MARK_KEY" val="4f9b4b22-0777-477e-8010-78f1159b0aff"/>
-  <p:tag name="COMMONDATA" val="eyJoZGlkIjoiYjRhZjQ5NWVmZmQxNmM3NmNkNDYxNWRmNzNmMjA1ZDAifQ=="/>
-</p:tagLst>
-</file>
-
 <file path=ppt/tags/tag2.xml><?xml version="1.0" encoding="utf-8"?>
 <p:tagLst xmlns:p="http://schemas.openxmlformats.org/presentationml/2006/main">
   <p:tag name="KSO_WM_TAG_VERSION" val="1.0"/>
   <p:tag name="KSO_WM_TEMPLATE_CATEGORY" val="custom"/>
   <p:tag name="KSO_WM_TEMPLATE_INDEX" val="160402"/>
+</p:tagLst>
+</file>
+
+<file path=ppt/tags/tag20.xml><?xml version="1.0" encoding="utf-8"?>
+<p:tagLst xmlns:p="http://schemas.openxmlformats.org/presentationml/2006/main">
+  <p:tag name="KSO_WPP_MARK_KEY" val="4f9b4b22-0777-477e-8010-78f1159b0aff"/>
+  <p:tag name="COMMONDATA" val="eyJoZGlkIjoiYjRhZjQ5NWVmZmQxNmM3NmNkNDYxNWRmNzNmMjA1ZDAifQ=="/>
 </p:tagLst>
 </file>
 
